--- a/word-drafts/figures/Vision-Fig2-Instances.pptx
+++ b/word-drafts/figures/Vision-Fig2-Instances.pptx
@@ -5971,15 +5971,15 @@
         <p:nvCxnSpPr>
           <p:cNvPr id="61" name="Connector 60"/>
           <p:cNvCxnSpPr>
-            <a:stCxn id="22" idx="2"/>
-            <a:endCxn id="9" idx="0"/>
+            <a:stCxn id="23" idx="2"/>
+            <a:endCxn id="19" idx="0"/>
           </p:cNvCxnSpPr>
           <p:nvPr/>
         </p:nvCxnSpPr>
         <p:spPr>
-          <a:xfrm flipH="1">
-            <a:off x="2628900" y="3181350"/>
-            <a:ext cx="3857625" cy="552450"/>
+          <a:xfrm>
+            <a:off x="10344150" y="4267200"/>
+            <a:ext cx="1285875" cy="552450"/>
           </a:xfrm>
           <a:prstGeom prst="line">
             <a:avLst/>
@@ -6014,8 +6014,8 @@
         </p:nvSpPr>
         <p:spPr>
           <a:xfrm>
-            <a:off x="4595812" y="3400425"/>
-            <a:ext cx="304800" cy="123825"/>
+            <a:off x="11025187" y="4486275"/>
+            <a:ext cx="466725" cy="123825"/>
           </a:xfrm>
           <a:prstGeom prst="rect">
             <a:avLst/>
@@ -6034,7 +6034,7 @@
                   <a:srgbClr val="444444"/>
                 </a:solidFill>
               </a:rPr>
-              <a:t>Sensor</a:t>
+              <a:t>ModelUsed</a:t>
             </a:r>
           </a:p>
         </p:txBody>
@@ -6044,14 +6044,14 @@
           <p:cNvPr id="63" name="Connector 62"/>
           <p:cNvCxnSpPr>
             <a:stCxn id="22" idx="2"/>
-            <a:endCxn id="21" idx="0"/>
+            <a:endCxn id="9" idx="0"/>
           </p:cNvCxnSpPr>
           <p:nvPr/>
         </p:nvCxnSpPr>
         <p:spPr>
-          <a:xfrm>
-            <a:off x="6486525" y="3181350"/>
-            <a:ext cx="1285875" cy="552450"/>
+          <a:xfrm flipH="1">
+            <a:off x="2628900" y="3181350"/>
+            <a:ext cx="3857625" cy="552450"/>
           </a:xfrm>
           <a:prstGeom prst="line">
             <a:avLst/>
@@ -6086,8 +6086,8 @@
         </p:nvSpPr>
         <p:spPr>
           <a:xfrm>
-            <a:off x="7167562" y="3400425"/>
-            <a:ext cx="504825" cy="123825"/>
+            <a:off x="4595812" y="3400425"/>
+            <a:ext cx="304800" cy="123825"/>
           </a:xfrm>
           <a:prstGeom prst="rect">
             <a:avLst/>
@@ -6106,7 +6106,7 @@
                   <a:srgbClr val="444444"/>
                 </a:solidFill>
               </a:rPr>
-              <a:t>Deployment</a:t>
+              <a:t>Sensor</a:t>
             </a:r>
           </a:p>
         </p:txBody>
@@ -6115,15 +6115,15 @@
         <p:nvCxnSpPr>
           <p:cNvPr id="65" name="Connector 64"/>
           <p:cNvCxnSpPr>
-            <a:stCxn id="17" idx="2"/>
-            <a:endCxn id="18" idx="0"/>
+            <a:stCxn id="22" idx="2"/>
+            <a:endCxn id="21" idx="0"/>
           </p:cNvCxnSpPr>
           <p:nvPr/>
         </p:nvCxnSpPr>
         <p:spPr>
-          <a:xfrm flipH="1">
-            <a:off x="7772400" y="6438900"/>
-            <a:ext cx="3857625" cy="552450"/>
+          <a:xfrm>
+            <a:off x="6486525" y="3181350"/>
+            <a:ext cx="1285875" cy="552450"/>
           </a:xfrm>
           <a:prstGeom prst="line">
             <a:avLst/>
@@ -6158,8 +6158,8 @@
         </p:nvSpPr>
         <p:spPr>
           <a:xfrm>
-            <a:off x="9739312" y="6657975"/>
-            <a:ext cx="1019175" cy="123825"/>
+            <a:off x="7167562" y="3400425"/>
+            <a:ext cx="504825" cy="123825"/>
           </a:xfrm>
           <a:prstGeom prst="rect">
             <a:avLst/>
@@ -6178,7 +6178,7 @@
                   <a:srgbClr val="444444"/>
                 </a:solidFill>
               </a:rPr>
-              <a:t>SourceFrame / TargetFrame</a:t>
+              <a:t>Deployment</a:t>
             </a:r>
           </a:p>
         </p:txBody>
@@ -6187,15 +6187,15 @@
         <p:nvCxnSpPr>
           <p:cNvPr id="67" name="Connector 66"/>
           <p:cNvCxnSpPr>
-            <a:stCxn id="18" idx="2"/>
+            <a:stCxn id="17" idx="2"/>
             <a:endCxn id="18" idx="0"/>
           </p:cNvCxnSpPr>
           <p:nvPr/>
         </p:nvCxnSpPr>
         <p:spPr>
-          <a:xfrm flipV="1">
-            <a:off x="7772400" y="6991350"/>
-            <a:ext cx="0" cy="533400"/>
+          <a:xfrm flipH="1">
+            <a:off x="7772400" y="6438900"/>
+            <a:ext cx="3857625" cy="552450"/>
           </a:xfrm>
           <a:prstGeom prst="line">
             <a:avLst/>
@@ -6230,8 +6230,8 @@
         </p:nvSpPr>
         <p:spPr>
           <a:xfrm>
-            <a:off x="7810500" y="7629525"/>
-            <a:ext cx="504825" cy="123825"/>
+            <a:off x="9739312" y="6657975"/>
+            <a:ext cx="1019175" cy="123825"/>
           </a:xfrm>
           <a:prstGeom prst="rect">
             <a:avLst/>
@@ -6250,7 +6250,7 @@
                   <a:srgbClr val="444444"/>
                 </a:solidFill>
               </a:rPr>
-              <a:t>ParentFrame</a:t>
+              <a:t>SourceFrame / TargetFrame</a:t>
             </a:r>
           </a:p>
         </p:txBody>
@@ -6259,15 +6259,15 @@
         <p:nvCxnSpPr>
           <p:cNvPr id="69" name="Connector 68"/>
           <p:cNvCxnSpPr>
-            <a:stCxn id="25" idx="2"/>
-            <a:endCxn id="20" idx="0"/>
+            <a:stCxn id="18" idx="2"/>
+            <a:endCxn id="18" idx="0"/>
           </p:cNvCxnSpPr>
           <p:nvPr/>
         </p:nvCxnSpPr>
         <p:spPr>
-          <a:xfrm flipH="1">
-            <a:off x="5200650" y="3181350"/>
-            <a:ext cx="3857625" cy="552450"/>
+          <a:xfrm flipV="1">
+            <a:off x="7772400" y="6991350"/>
+            <a:ext cx="0" cy="533400"/>
           </a:xfrm>
           <a:prstGeom prst="line">
             <a:avLst/>
@@ -6302,8 +6302,8 @@
         </p:nvSpPr>
         <p:spPr>
           <a:xfrm>
-            <a:off x="7167562" y="3543300"/>
-            <a:ext cx="333375" cy="123825"/>
+            <a:off x="7810500" y="7629525"/>
+            <a:ext cx="504825" cy="123825"/>
           </a:xfrm>
           <a:prstGeom prst="rect">
             <a:avLst/>
@@ -6322,7 +6322,7 @@
                   <a:srgbClr val="444444"/>
                 </a:solidFill>
               </a:rPr>
-              <a:t>Dataset</a:t>
+              <a:t>ParentFrame</a:t>
             </a:r>
           </a:p>
         </p:txBody>
@@ -6332,14 +6332,14 @@
           <p:cNvPr id="71" name="Connector 70"/>
           <p:cNvCxnSpPr>
             <a:stCxn id="25" idx="2"/>
-            <a:endCxn id="19" idx="0"/>
+            <a:endCxn id="20" idx="0"/>
           </p:cNvCxnSpPr>
           <p:nvPr/>
         </p:nvCxnSpPr>
         <p:spPr>
-          <a:xfrm>
-            <a:off x="9058275" y="3181350"/>
-            <a:ext cx="2571750" cy="1638300"/>
+          <a:xfrm flipH="1">
+            <a:off x="5200650" y="3181350"/>
+            <a:ext cx="3857625" cy="552450"/>
           </a:xfrm>
           <a:prstGeom prst="line">
             <a:avLst/>
@@ -6369,6 +6369,78 @@
       <p:sp>
         <p:nvSpPr>
           <p:cNvPr id="72" name="TextBox 71"/>
+          <p:cNvSpPr txBox="1"/>
+          <p:nvPr/>
+        </p:nvSpPr>
+        <p:spPr>
+          <a:xfrm>
+            <a:off x="7167562" y="3543300"/>
+            <a:ext cx="333375" cy="123825"/>
+          </a:xfrm>
+          <a:prstGeom prst="rect">
+            <a:avLst/>
+          </a:prstGeom>
+          <a:noFill/>
+        </p:spPr>
+        <p:txBody>
+          <a:bodyPr wrap="none" lIns="0" rIns="0" tIns="0" bIns="0">
+            <a:spAutoFit/>
+          </a:bodyPr>
+          <a:lstStyle/>
+          <a:p>
+            <a:r>
+              <a:rPr sz="800">
+                <a:solidFill>
+                  <a:srgbClr val="444444"/>
+                </a:solidFill>
+              </a:rPr>
+              <a:t>Dataset</a:t>
+            </a:r>
+          </a:p>
+        </p:txBody>
+      </p:sp>
+      <p:cxnSp>
+        <p:nvCxnSpPr>
+          <p:cNvPr id="73" name="Connector 72"/>
+          <p:cNvCxnSpPr>
+            <a:stCxn id="25" idx="2"/>
+            <a:endCxn id="19" idx="0"/>
+          </p:cNvCxnSpPr>
+          <p:nvPr/>
+        </p:nvCxnSpPr>
+        <p:spPr>
+          <a:xfrm>
+            <a:off x="9058275" y="3181350"/>
+            <a:ext cx="2571750" cy="1638300"/>
+          </a:xfrm>
+          <a:prstGeom prst="line">
+            <a:avLst/>
+          </a:prstGeom>
+          <a:ln w="12700">
+            <a:solidFill>
+              <a:srgbClr val="444444"/>
+            </a:solidFill>
+            <a:prstDash val="dash"/>
+          </a:ln>
+        </p:spPr>
+        <p:style>
+          <a:lnRef idx="2">
+            <a:schemeClr val="accent1"/>
+          </a:lnRef>
+          <a:fillRef idx="0">
+            <a:schemeClr val="accent1"/>
+          </a:fillRef>
+          <a:effectRef idx="1">
+            <a:schemeClr val="accent1"/>
+          </a:effectRef>
+          <a:fontRef idx="minor">
+            <a:schemeClr val="tx1"/>
+          </a:fontRef>
+        </p:style>
+      </p:cxnSp>
+      <p:sp>
+        <p:nvSpPr>
+          <p:cNvPr id="74" name="TextBox 73"/>
           <p:cNvSpPr txBox="1"/>
           <p:nvPr/>
         </p:nvSpPr>

--- a/word-drafts/figures/Vision-Fig2-Instances.pptx
+++ b/word-drafts/figures/Vision-Fig2-Instances.pptx
@@ -4428,6 +4428,17 @@
                 </a:solidFill>
               </a:rPr>
               <a:t>State, Continuous</a:t>
+            </a:r>
+          </a:p>
+          <a:p>
+            <a:pPr algn="ctr"/>
+            <a:r>
+              <a:rPr sz="900">
+                <a:solidFill>
+                  <a:srgbClr val="111111"/>
+                </a:solidFill>
+              </a:rPr>
+              <a:t>MaxResultAge, MaxRetainedResults</a:t>
             </a:r>
           </a:p>
         </p:txBody>

--- a/word-drafts/figures/Vision-Fig2-Instances.pptx
+++ b/word-drafts/figures/Vision-Fig2-Instances.pptx
@@ -4430,6 +4430,17 @@
               <a:t>State, Continuous</a:t>
             </a:r>
           </a:p>
+          <a:p>
+            <a:pPr algn="ctr"/>
+            <a:r>
+              <a:rPr sz="900">
+                <a:solidFill>
+                  <a:srgbClr val="111111"/>
+                </a:solidFill>
+              </a:rPr>
+              <a:t>MaxResultAge, MaxRetainedResults</a:t>
+            </a:r>
+          </a:p>
         </p:txBody>
       </p:sp>
       <p:sp>
@@ -5971,15 +5982,15 @@
         <p:nvCxnSpPr>
           <p:cNvPr id="61" name="Connector 60"/>
           <p:cNvCxnSpPr>
-            <a:stCxn id="22" idx="2"/>
-            <a:endCxn id="9" idx="0"/>
+            <a:stCxn id="23" idx="2"/>
+            <a:endCxn id="19" idx="0"/>
           </p:cNvCxnSpPr>
           <p:nvPr/>
         </p:nvCxnSpPr>
         <p:spPr>
-          <a:xfrm flipH="1">
-            <a:off x="2628900" y="3181350"/>
-            <a:ext cx="3857625" cy="552450"/>
+          <a:xfrm>
+            <a:off x="10344150" y="4267200"/>
+            <a:ext cx="1285875" cy="552450"/>
           </a:xfrm>
           <a:prstGeom prst="line">
             <a:avLst/>
@@ -6014,8 +6025,8 @@
         </p:nvSpPr>
         <p:spPr>
           <a:xfrm>
-            <a:off x="4595812" y="3400425"/>
-            <a:ext cx="304800" cy="123825"/>
+            <a:off x="11025187" y="4486275"/>
+            <a:ext cx="466725" cy="123825"/>
           </a:xfrm>
           <a:prstGeom prst="rect">
             <a:avLst/>
@@ -6034,7 +6045,7 @@
                   <a:srgbClr val="444444"/>
                 </a:solidFill>
               </a:rPr>
-              <a:t>Sensor</a:t>
+              <a:t>ModelUsed</a:t>
             </a:r>
           </a:p>
         </p:txBody>
@@ -6044,14 +6055,14 @@
           <p:cNvPr id="63" name="Connector 62"/>
           <p:cNvCxnSpPr>
             <a:stCxn id="22" idx="2"/>
-            <a:endCxn id="21" idx="0"/>
+            <a:endCxn id="9" idx="0"/>
           </p:cNvCxnSpPr>
           <p:nvPr/>
         </p:nvCxnSpPr>
         <p:spPr>
-          <a:xfrm>
-            <a:off x="6486525" y="3181350"/>
-            <a:ext cx="1285875" cy="552450"/>
+          <a:xfrm flipH="1">
+            <a:off x="2628900" y="3181350"/>
+            <a:ext cx="3857625" cy="552450"/>
           </a:xfrm>
           <a:prstGeom prst="line">
             <a:avLst/>
@@ -6086,8 +6097,8 @@
         </p:nvSpPr>
         <p:spPr>
           <a:xfrm>
-            <a:off x="7167562" y="3400425"/>
-            <a:ext cx="504825" cy="123825"/>
+            <a:off x="4595812" y="3400425"/>
+            <a:ext cx="304800" cy="123825"/>
           </a:xfrm>
           <a:prstGeom prst="rect">
             <a:avLst/>
@@ -6106,7 +6117,7 @@
                   <a:srgbClr val="444444"/>
                 </a:solidFill>
               </a:rPr>
-              <a:t>Deployment</a:t>
+              <a:t>Sensor</a:t>
             </a:r>
           </a:p>
         </p:txBody>
@@ -6115,15 +6126,15 @@
         <p:nvCxnSpPr>
           <p:cNvPr id="65" name="Connector 64"/>
           <p:cNvCxnSpPr>
-            <a:stCxn id="17" idx="2"/>
-            <a:endCxn id="18" idx="0"/>
+            <a:stCxn id="22" idx="2"/>
+            <a:endCxn id="21" idx="0"/>
           </p:cNvCxnSpPr>
           <p:nvPr/>
         </p:nvCxnSpPr>
         <p:spPr>
-          <a:xfrm flipH="1">
-            <a:off x="7772400" y="6438900"/>
-            <a:ext cx="3857625" cy="552450"/>
+          <a:xfrm>
+            <a:off x="6486525" y="3181350"/>
+            <a:ext cx="1285875" cy="552450"/>
           </a:xfrm>
           <a:prstGeom prst="line">
             <a:avLst/>
@@ -6158,8 +6169,8 @@
         </p:nvSpPr>
         <p:spPr>
           <a:xfrm>
-            <a:off x="9739312" y="6657975"/>
-            <a:ext cx="1019175" cy="123825"/>
+            <a:off x="7167562" y="3400425"/>
+            <a:ext cx="504825" cy="123825"/>
           </a:xfrm>
           <a:prstGeom prst="rect">
             <a:avLst/>
@@ -6178,7 +6189,7 @@
                   <a:srgbClr val="444444"/>
                 </a:solidFill>
               </a:rPr>
-              <a:t>SourceFrame / TargetFrame</a:t>
+              <a:t>Deployment</a:t>
             </a:r>
           </a:p>
         </p:txBody>
@@ -6187,15 +6198,15 @@
         <p:nvCxnSpPr>
           <p:cNvPr id="67" name="Connector 66"/>
           <p:cNvCxnSpPr>
-            <a:stCxn id="18" idx="2"/>
+            <a:stCxn id="17" idx="2"/>
             <a:endCxn id="18" idx="0"/>
           </p:cNvCxnSpPr>
           <p:nvPr/>
         </p:nvCxnSpPr>
         <p:spPr>
-          <a:xfrm flipV="1">
-            <a:off x="7772400" y="6991350"/>
-            <a:ext cx="0" cy="533400"/>
+          <a:xfrm flipH="1">
+            <a:off x="7772400" y="6438900"/>
+            <a:ext cx="3857625" cy="552450"/>
           </a:xfrm>
           <a:prstGeom prst="line">
             <a:avLst/>
@@ -6230,8 +6241,8 @@
         </p:nvSpPr>
         <p:spPr>
           <a:xfrm>
-            <a:off x="7810500" y="7629525"/>
-            <a:ext cx="504825" cy="123825"/>
+            <a:off x="9739312" y="6657975"/>
+            <a:ext cx="1019175" cy="123825"/>
           </a:xfrm>
           <a:prstGeom prst="rect">
             <a:avLst/>
@@ -6250,7 +6261,7 @@
                   <a:srgbClr val="444444"/>
                 </a:solidFill>
               </a:rPr>
-              <a:t>ParentFrame</a:t>
+              <a:t>SourceFrame / TargetFrame</a:t>
             </a:r>
           </a:p>
         </p:txBody>
@@ -6259,15 +6270,15 @@
         <p:nvCxnSpPr>
           <p:cNvPr id="69" name="Connector 68"/>
           <p:cNvCxnSpPr>
-            <a:stCxn id="25" idx="2"/>
-            <a:endCxn id="20" idx="0"/>
+            <a:stCxn id="18" idx="2"/>
+            <a:endCxn id="18" idx="0"/>
           </p:cNvCxnSpPr>
           <p:nvPr/>
         </p:nvCxnSpPr>
         <p:spPr>
-          <a:xfrm flipH="1">
-            <a:off x="5200650" y="3181350"/>
-            <a:ext cx="3857625" cy="552450"/>
+          <a:xfrm flipV="1">
+            <a:off x="7772400" y="6991350"/>
+            <a:ext cx="0" cy="533400"/>
           </a:xfrm>
           <a:prstGeom prst="line">
             <a:avLst/>
@@ -6302,8 +6313,8 @@
         </p:nvSpPr>
         <p:spPr>
           <a:xfrm>
-            <a:off x="7167562" y="3543300"/>
-            <a:ext cx="333375" cy="123825"/>
+            <a:off x="7810500" y="7629525"/>
+            <a:ext cx="504825" cy="123825"/>
           </a:xfrm>
           <a:prstGeom prst="rect">
             <a:avLst/>
@@ -6322,7 +6333,7 @@
                   <a:srgbClr val="444444"/>
                 </a:solidFill>
               </a:rPr>
-              <a:t>Dataset</a:t>
+              <a:t>ParentFrame</a:t>
             </a:r>
           </a:p>
         </p:txBody>
@@ -6332,14 +6343,14 @@
           <p:cNvPr id="71" name="Connector 70"/>
           <p:cNvCxnSpPr>
             <a:stCxn id="25" idx="2"/>
-            <a:endCxn id="19" idx="0"/>
+            <a:endCxn id="20" idx="0"/>
           </p:cNvCxnSpPr>
           <p:nvPr/>
         </p:nvCxnSpPr>
         <p:spPr>
-          <a:xfrm>
-            <a:off x="9058275" y="3181350"/>
-            <a:ext cx="2571750" cy="1638300"/>
+          <a:xfrm flipH="1">
+            <a:off x="5200650" y="3181350"/>
+            <a:ext cx="3857625" cy="552450"/>
           </a:xfrm>
           <a:prstGeom prst="line">
             <a:avLst/>
@@ -6369,6 +6380,78 @@
       <p:sp>
         <p:nvSpPr>
           <p:cNvPr id="72" name="TextBox 71"/>
+          <p:cNvSpPr txBox="1"/>
+          <p:nvPr/>
+        </p:nvSpPr>
+        <p:spPr>
+          <a:xfrm>
+            <a:off x="7167562" y="3543300"/>
+            <a:ext cx="333375" cy="123825"/>
+          </a:xfrm>
+          <a:prstGeom prst="rect">
+            <a:avLst/>
+          </a:prstGeom>
+          <a:noFill/>
+        </p:spPr>
+        <p:txBody>
+          <a:bodyPr wrap="none" lIns="0" rIns="0" tIns="0" bIns="0">
+            <a:spAutoFit/>
+          </a:bodyPr>
+          <a:lstStyle/>
+          <a:p>
+            <a:r>
+              <a:rPr sz="800">
+                <a:solidFill>
+                  <a:srgbClr val="444444"/>
+                </a:solidFill>
+              </a:rPr>
+              <a:t>Dataset</a:t>
+            </a:r>
+          </a:p>
+        </p:txBody>
+      </p:sp>
+      <p:cxnSp>
+        <p:nvCxnSpPr>
+          <p:cNvPr id="73" name="Connector 72"/>
+          <p:cNvCxnSpPr>
+            <a:stCxn id="25" idx="2"/>
+            <a:endCxn id="19" idx="0"/>
+          </p:cNvCxnSpPr>
+          <p:nvPr/>
+        </p:nvCxnSpPr>
+        <p:spPr>
+          <a:xfrm>
+            <a:off x="9058275" y="3181350"/>
+            <a:ext cx="2571750" cy="1638300"/>
+          </a:xfrm>
+          <a:prstGeom prst="line">
+            <a:avLst/>
+          </a:prstGeom>
+          <a:ln w="12700">
+            <a:solidFill>
+              <a:srgbClr val="444444"/>
+            </a:solidFill>
+            <a:prstDash val="dash"/>
+          </a:ln>
+        </p:spPr>
+        <p:style>
+          <a:lnRef idx="2">
+            <a:schemeClr val="accent1"/>
+          </a:lnRef>
+          <a:fillRef idx="0">
+            <a:schemeClr val="accent1"/>
+          </a:fillRef>
+          <a:effectRef idx="1">
+            <a:schemeClr val="accent1"/>
+          </a:effectRef>
+          <a:fontRef idx="minor">
+            <a:schemeClr val="tx1"/>
+          </a:fontRef>
+        </p:style>
+      </p:cxnSp>
+      <p:sp>
+        <p:nvSpPr>
+          <p:cNvPr id="74" name="TextBox 73"/>
           <p:cNvSpPr txBox="1"/>
           <p:nvPr/>
         </p:nvSpPr>

--- a/word-drafts/figures/Vision-Fig2-Instances.pptx
+++ b/word-drafts/figures/Vision-Fig2-Instances.pptx
@@ -5594,7 +5594,7 @@
         <p:spPr>
           <a:xfrm>
             <a:off x="5881687" y="5457825"/>
-            <a:ext cx="581025" cy="123825"/>
+            <a:ext cx="723900" cy="123825"/>
           </a:xfrm>
           <a:prstGeom prst="rect">
             <a:avLst/>
@@ -5666,7 +5666,7 @@
         <p:spPr>
           <a:xfrm>
             <a:off x="7167562" y="5457825"/>
-            <a:ext cx="581025" cy="123825"/>
+            <a:ext cx="723900" cy="123825"/>
           </a:xfrm>
           <a:prstGeom prst="rect">
             <a:avLst/>
@@ -5738,7 +5738,7 @@
         <p:spPr>
           <a:xfrm>
             <a:off x="5238750" y="5572125"/>
-            <a:ext cx="504825" cy="123825"/>
+            <a:ext cx="619125" cy="123825"/>
           </a:xfrm>
           <a:prstGeom prst="rect">
             <a:avLst/>
@@ -5810,7 +5810,7 @@
         <p:spPr>
           <a:xfrm>
             <a:off x="8453437" y="4486275"/>
-            <a:ext cx="552450" cy="123825"/>
+            <a:ext cx="733425" cy="123825"/>
           </a:xfrm>
           <a:prstGeom prst="rect">
             <a:avLst/>
@@ -5882,7 +5882,7 @@
         <p:spPr>
           <a:xfrm>
             <a:off x="9739312" y="4486275"/>
-            <a:ext cx="762000" cy="123825"/>
+            <a:ext cx="952500" cy="123825"/>
           </a:xfrm>
           <a:prstGeom prst="rect">
             <a:avLst/>
@@ -5954,7 +5954,7 @@
         <p:spPr>
           <a:xfrm>
             <a:off x="8453437" y="3400425"/>
-            <a:ext cx="495300" cy="123825"/>
+            <a:ext cx="619125" cy="123825"/>
           </a:xfrm>
           <a:prstGeom prst="rect">
             <a:avLst/>
@@ -6026,7 +6026,7 @@
         <p:spPr>
           <a:xfrm>
             <a:off x="11025187" y="4486275"/>
-            <a:ext cx="466725" cy="123825"/>
+            <a:ext cx="571500" cy="123825"/>
           </a:xfrm>
           <a:prstGeom prst="rect">
             <a:avLst/>
@@ -6098,7 +6098,7 @@
         <p:spPr>
           <a:xfrm>
             <a:off x="4595812" y="3400425"/>
-            <a:ext cx="304800" cy="123825"/>
+            <a:ext cx="381000" cy="123825"/>
           </a:xfrm>
           <a:prstGeom prst="rect">
             <a:avLst/>
@@ -6170,7 +6170,7 @@
         <p:spPr>
           <a:xfrm>
             <a:off x="7167562" y="3400425"/>
-            <a:ext cx="504825" cy="123825"/>
+            <a:ext cx="619125" cy="123825"/>
           </a:xfrm>
           <a:prstGeom prst="rect">
             <a:avLst/>
@@ -6242,7 +6242,7 @@
         <p:spPr>
           <a:xfrm>
             <a:off x="9739312" y="6657975"/>
-            <a:ext cx="1019175" cy="123825"/>
+            <a:ext cx="1314450" cy="123825"/>
           </a:xfrm>
           <a:prstGeom prst="rect">
             <a:avLst/>
@@ -6314,7 +6314,7 @@
         <p:spPr>
           <a:xfrm>
             <a:off x="7810500" y="7629525"/>
-            <a:ext cx="504825" cy="123825"/>
+            <a:ext cx="657225" cy="123825"/>
           </a:xfrm>
           <a:prstGeom prst="rect">
             <a:avLst/>
@@ -6386,7 +6386,7 @@
         <p:spPr>
           <a:xfrm>
             <a:off x="7167562" y="3543300"/>
-            <a:ext cx="333375" cy="123825"/>
+            <a:ext cx="390525" cy="123825"/>
           </a:xfrm>
           <a:prstGeom prst="rect">
             <a:avLst/>
@@ -6458,7 +6458,7 @@
         <p:spPr>
           <a:xfrm>
             <a:off x="10382250" y="4657725"/>
-            <a:ext cx="647700" cy="123825"/>
+            <a:ext cx="809625" cy="123825"/>
           </a:xfrm>
           <a:prstGeom prst="rect">
             <a:avLst/>
